--- a/decks/hist-russian-revolution/hist-russian-revolution_ch2_nineteen-five.pptx
+++ b/decks/hist-russian-revolution/hist-russian-revolution_ch2_nineteen-five.pptx
@@ -130,31 +130,31 @@
   <p:extLst>
     <p:ext uri="{521415D9-36F7-43E2-AB2F-B90AF26B5E84}">
       <p14:sectionLst xmlns:p14="http://schemas.microsoft.com/office/powerpoint/2010/main">
-        <p14:section name="Opening" id="{0f175955-016c-ae5e-dfce-74e77743a3d2}">
+        <p14:section name="Opening" id="{279d1d59-fd6d-a157-6acf-e0dce0b93255}">
           <p14:sldIdLst>
             <p14:sldId id="256"/>
           </p14:sldIdLst>
         </p14:section>
-        <p14:section name="Gate" id="{885172b4-bf9f-db35-ae0c-ac066014e33b}">
+        <p14:section name="Gate" id="{828d1bd9-ff01-637b-ff57-706bde585d18}">
           <p14:sldIdLst>
             <p14:sldId id="257"/>
             <p14:sldId id="258"/>
             <p14:sldId id="259"/>
           </p14:sldIdLst>
         </p14:section>
-        <p14:section name="Pre-teach" id="{030e5b2b-135a-1e64-8032-2394f64f5178}">
+        <p14:section name="Pre-teach" id="{147ada53-1c6f-d5a5-8a02-6c35547c6b4d}">
           <p14:sldIdLst>
             <p14:sldId id="260"/>
             <p14:sldId id="261"/>
           </p14:sldIdLst>
         </p14:section>
-        <p14:section name="Read-along" id="{d313bce9-f90f-a250-5801-f69fbd13d7dc}">
+        <p14:section name="Read-along" id="{861c14e0-7355-9b39-13b8-9af25637346b}">
           <p14:sldIdLst>
             <p14:sldId id="262"/>
             <p14:sldId id="263"/>
           </p14:sldIdLst>
         </p14:section>
-        <p14:section name="Teach" id="{013a1121-1cfa-87e4-f318-796f92eaee21}">
+        <p14:section name="Teach" id="{ec8903e1-4ee7-2509-e105-fbb20ac9fa1a}">
           <p14:sldIdLst>
             <p14:sldId id="264"/>
             <p14:sldId id="265"/>
@@ -163,7 +163,7 @@
             <p14:sldId id="268"/>
           </p14:sldIdLst>
         </p14:section>
-        <p14:section name="Routes" id="{34fecbe8-4828-c191-7691-4af64f8e5e2e}">
+        <p14:section name="Routes" id="{053ab37e-88de-9c5e-d545-b05e742a444a}">
           <p14:sldIdLst>
             <p14:sldId id="269"/>
             <p14:sldId id="270"/>
@@ -174,12 +174,12 @@
             <p14:sldId id="275"/>
           </p14:sldIdLst>
         </p14:section>
-        <p14:section name="Close" id="{17a982ba-f59f-fed2-ef62-2d009575b274}">
+        <p14:section name="Close" id="{bf2150be-cc44-f6a3-a5d7-c3bc713555f8}">
           <p14:sldIdLst>
             <p14:sldId id="276"/>
           </p14:sldIdLst>
         </p14:section>
-        <p14:section name="Answers" id="{6fbff83c-6735-6777-a470-2b5f36e79de5}">
+        <p14:section name="Answers" id="{e3e05de7-8b73-9310-abc6-18c44fb37d90}">
           <p14:sldIdLst>
             <p14:sldId id="277"/>
             <p14:sldId id="278"/>
